--- a/docs/proposals/LVMH向け最終提案_ディスカッション資料形式.pptx
+++ b/docs/proposals/LVMH向け最終提案_ディスカッション資料形式.pptx
@@ -2783,32 +2783,32 @@
         </p:nvSpPr>
         <p:spPr>
           <a:xfrm>
-            <a:off x="658368" y="1847088"/>
-            <a:ext cx="4572000" cy="219456"/>
-          </a:xfrm>
-          <a:prstGeom prst="rect">
-            <a:avLst/>
-          </a:prstGeom>
-          <a:noFill/>
-          <a:ln/>
-        </p:spPr>
-        <p:txBody>
-          <a:bodyPr wrap="square" lIns="0" tIns="0" rIns="0" bIns="0" rtlCol="0" anchor="ctr"/>
-          <a:lstStyle/>
-          <a:p>
-            <a:pPr indent="0" marL="0">
-              <a:buNone/>
-            </a:pPr>
-            <a:r>
-              <a:rPr lang="en-US" sz="900" spc="200" kern="0" dirty="0">
+            <a:off x="658368" y="1865376"/>
+            <a:ext cx="8686800" cy="219456"/>
+          </a:xfrm>
+          <a:prstGeom prst="rect">
+            <a:avLst/>
+          </a:prstGeom>
+          <a:noFill/>
+          <a:ln/>
+        </p:spPr>
+        <p:txBody>
+          <a:bodyPr wrap="square" lIns="0" tIns="0" rIns="0" bIns="0" rtlCol="0" anchor="ctr"/>
+          <a:lstStyle/>
+          <a:p>
+            <a:pPr indent="0" marL="0">
+              <a:buNone/>
+            </a:pPr>
+            <a:r>
+              <a:rPr lang="en-US" sz="900" dirty="0">
                 <a:solidFill>
                   <a:srgbClr val="808080"/>
                 </a:solidFill>
-                <a:latin typeface="Arial" pitchFamily="34" charset="0"/>
-                <a:ea typeface="Arial" pitchFamily="34" charset="-122"/>
-                <a:cs typeface="Arial" pitchFamily="34" charset="-120"/>
-              </a:rPr>
-              <a:t>ALIEN METRON</a:t>
+                <a:latin typeface="Yu Gothic" pitchFamily="34" charset="0"/>
+                <a:ea typeface="Yu Gothic" pitchFamily="34" charset="-122"/>
+                <a:cs typeface="Yu Gothic" pitchFamily="34" charset="-120"/>
+              </a:rPr>
+              <a:t>初出:『ウルトラセブン』第8話「狙われた街」(1967年)</a:t>
             </a:r>
             <a:endParaRPr lang="en-US" sz="900" dirty="0"/>
           </a:p>
@@ -3990,32 +3990,32 @@
         </p:nvSpPr>
         <p:spPr>
           <a:xfrm>
-            <a:off x="658368" y="1847088"/>
-            <a:ext cx="4572000" cy="219456"/>
-          </a:xfrm>
-          <a:prstGeom prst="rect">
-            <a:avLst/>
-          </a:prstGeom>
-          <a:noFill/>
-          <a:ln/>
-        </p:spPr>
-        <p:txBody>
-          <a:bodyPr wrap="square" lIns="0" tIns="0" rIns="0" bIns="0" rtlCol="0" anchor="ctr"/>
-          <a:lstStyle/>
-          <a:p>
-            <a:pPr indent="0" marL="0">
-              <a:buNone/>
-            </a:pPr>
-            <a:r>
-              <a:rPr lang="en-US" sz="900" spc="200" kern="0" dirty="0">
+            <a:off x="658368" y="1865376"/>
+            <a:ext cx="8686800" cy="219456"/>
+          </a:xfrm>
+          <a:prstGeom prst="rect">
+            <a:avLst/>
+          </a:prstGeom>
+          <a:noFill/>
+          <a:ln/>
+        </p:spPr>
+        <p:txBody>
+          <a:bodyPr wrap="square" lIns="0" tIns="0" rIns="0" bIns="0" rtlCol="0" anchor="ctr"/>
+          <a:lstStyle/>
+          <a:p>
+            <a:pPr indent="0" marL="0">
+              <a:buNone/>
+            </a:pPr>
+            <a:r>
+              <a:rPr lang="en-US" sz="900" dirty="0">
                 <a:solidFill>
                   <a:srgbClr val="808080"/>
                 </a:solidFill>
-                <a:latin typeface="Arial" pitchFamily="34" charset="0"/>
-                <a:ea typeface="Arial" pitchFamily="34" charset="-122"/>
-                <a:cs typeface="Arial" pitchFamily="34" charset="-120"/>
-              </a:rPr>
-              <a:t>KING JOE</a:t>
+                <a:latin typeface="Yu Gothic" pitchFamily="34" charset="0"/>
+                <a:ea typeface="Yu Gothic" pitchFamily="34" charset="-122"/>
+                <a:cs typeface="Yu Gothic" pitchFamily="34" charset="-120"/>
+              </a:rPr>
+              <a:t>初出:『ウルトラセブン』第14・15話「ウルトラ警備隊西へ」(1967–68年)</a:t>
             </a:r>
             <a:endParaRPr lang="en-US" sz="900" dirty="0"/>
           </a:p>
@@ -13206,7 +13206,7 @@
         <p:spPr>
           <a:xfrm>
             <a:off x="5806440" y="3886200"/>
-            <a:ext cx="2103120" cy="292608"/>
+            <a:ext cx="1554480" cy="292608"/>
           </a:xfrm>
           <a:prstGeom prst="rect">
             <a:avLst/>
@@ -13244,8 +13244,8 @@
         </p:nvSpPr>
         <p:spPr>
           <a:xfrm>
-            <a:off x="7936992" y="3886200"/>
-            <a:ext cx="2103120" cy="292608"/>
+            <a:off x="7360920" y="3886200"/>
+            <a:ext cx="2697480" cy="292608"/>
           </a:xfrm>
           <a:prstGeom prst="rect">
             <a:avLst/>
@@ -13269,7 +13269,7 @@
                 <a:ea typeface="Yu Gothic" pitchFamily="34" charset="-122"/>
                 <a:cs typeface="Yu Gothic" pitchFamily="34" charset="-120"/>
               </a:rPr>
-              <a:t>英名</a:t>
+              <a:t>初出</a:t>
             </a:r>
             <a:endParaRPr lang="en-US" sz="950" dirty="0"/>
           </a:p>
@@ -13309,7 +13309,7 @@
         <p:spPr>
           <a:xfrm>
             <a:off x="5943600" y="4178808"/>
-            <a:ext cx="1920240" cy="384048"/>
+            <a:ext cx="1417320" cy="384048"/>
           </a:xfrm>
           <a:prstGeom prst="rect">
             <a:avLst/>
@@ -13347,34 +13347,34 @@
         </p:nvSpPr>
         <p:spPr>
           <a:xfrm>
-            <a:off x="7936992" y="4178808"/>
-            <a:ext cx="2011680" cy="384048"/>
-          </a:xfrm>
-          <a:prstGeom prst="rect">
-            <a:avLst/>
-          </a:prstGeom>
-          <a:noFill/>
-          <a:ln/>
-        </p:spPr>
-        <p:txBody>
-          <a:bodyPr wrap="square" lIns="0" tIns="0" rIns="0" bIns="0" rtlCol="0" anchor="ctr"/>
-          <a:lstStyle/>
-          <a:p>
-            <a:pPr algn="ctr" indent="0" marL="0">
-              <a:buNone/>
-            </a:pPr>
-            <a:r>
-              <a:rPr lang="en-US" sz="900" spc="100" kern="0" dirty="0">
-                <a:solidFill>
-                  <a:srgbClr val="808080"/>
-                </a:solidFill>
-                <a:latin typeface="Arial" pitchFamily="34" charset="0"/>
-                <a:ea typeface="Arial" pitchFamily="34" charset="-122"/>
-                <a:cs typeface="Arial" pitchFamily="34" charset="-120"/>
-              </a:rPr>
-              <a:t>ALIEN BALTAN</a:t>
-            </a:r>
-            <a:endParaRPr lang="en-US" sz="900" dirty="0"/>
+            <a:off x="7406640" y="4178808"/>
+            <a:ext cx="2606040" cy="384048"/>
+          </a:xfrm>
+          <a:prstGeom prst="rect">
+            <a:avLst/>
+          </a:prstGeom>
+          <a:noFill/>
+          <a:ln/>
+        </p:spPr>
+        <p:txBody>
+          <a:bodyPr wrap="square" lIns="0" tIns="0" rIns="0" bIns="0" rtlCol="0" anchor="ctr"/>
+          <a:lstStyle/>
+          <a:p>
+            <a:pPr indent="0" marL="0">
+              <a:buNone/>
+            </a:pPr>
+            <a:r>
+              <a:rPr lang="en-US" sz="850" dirty="0">
+                <a:solidFill>
+                  <a:srgbClr val="404040"/>
+                </a:solidFill>
+                <a:latin typeface="Yu Gothic" pitchFamily="34" charset="0"/>
+                <a:ea typeface="Yu Gothic" pitchFamily="34" charset="-122"/>
+                <a:cs typeface="Yu Gothic" pitchFamily="34" charset="-120"/>
+              </a:rPr>
+              <a:t>『ウルトラマン』第2話(1966年)</a:t>
+            </a:r>
+            <a:endParaRPr lang="en-US" sz="850" dirty="0"/>
           </a:p>
         </p:txBody>
       </p:sp>
@@ -13412,7 +13412,7 @@
         <p:spPr>
           <a:xfrm>
             <a:off x="5943600" y="4562856"/>
-            <a:ext cx="1920240" cy="384048"/>
+            <a:ext cx="1417320" cy="384048"/>
           </a:xfrm>
           <a:prstGeom prst="rect">
             <a:avLst/>
@@ -13450,34 +13450,34 @@
         </p:nvSpPr>
         <p:spPr>
           <a:xfrm>
-            <a:off x="7936992" y="4562856"/>
-            <a:ext cx="2011680" cy="384048"/>
-          </a:xfrm>
-          <a:prstGeom prst="rect">
-            <a:avLst/>
-          </a:prstGeom>
-          <a:noFill/>
-          <a:ln/>
-        </p:spPr>
-        <p:txBody>
-          <a:bodyPr wrap="square" lIns="0" tIns="0" rIns="0" bIns="0" rtlCol="0" anchor="ctr"/>
-          <a:lstStyle/>
-          <a:p>
-            <a:pPr algn="ctr" indent="0" marL="0">
-              <a:buNone/>
-            </a:pPr>
-            <a:r>
-              <a:rPr lang="en-US" sz="900" spc="100" kern="0" dirty="0">
-                <a:solidFill>
-                  <a:srgbClr val="808080"/>
-                </a:solidFill>
-                <a:latin typeface="Arial" pitchFamily="34" charset="0"/>
-                <a:ea typeface="Arial" pitchFamily="34" charset="-122"/>
-                <a:cs typeface="Arial" pitchFamily="34" charset="-120"/>
-              </a:rPr>
-              <a:t>GOMORA</a:t>
-            </a:r>
-            <a:endParaRPr lang="en-US" sz="900" dirty="0"/>
+            <a:off x="7406640" y="4562856"/>
+            <a:ext cx="2606040" cy="384048"/>
+          </a:xfrm>
+          <a:prstGeom prst="rect">
+            <a:avLst/>
+          </a:prstGeom>
+          <a:noFill/>
+          <a:ln/>
+        </p:spPr>
+        <p:txBody>
+          <a:bodyPr wrap="square" lIns="0" tIns="0" rIns="0" bIns="0" rtlCol="0" anchor="ctr"/>
+          <a:lstStyle/>
+          <a:p>
+            <a:pPr indent="0" marL="0">
+              <a:buNone/>
+            </a:pPr>
+            <a:r>
+              <a:rPr lang="en-US" sz="850" dirty="0">
+                <a:solidFill>
+                  <a:srgbClr val="404040"/>
+                </a:solidFill>
+                <a:latin typeface="Yu Gothic" pitchFamily="34" charset="0"/>
+                <a:ea typeface="Yu Gothic" pitchFamily="34" charset="-122"/>
+                <a:cs typeface="Yu Gothic" pitchFamily="34" charset="-120"/>
+              </a:rPr>
+              <a:t>『ウルトラマン』第26・27話(1967年)</a:t>
+            </a:r>
+            <a:endParaRPr lang="en-US" sz="850" dirty="0"/>
           </a:p>
         </p:txBody>
       </p:sp>
@@ -13515,7 +13515,7 @@
         <p:spPr>
           <a:xfrm>
             <a:off x="5943600" y="4946904"/>
-            <a:ext cx="1920240" cy="384048"/>
+            <a:ext cx="1417320" cy="384048"/>
           </a:xfrm>
           <a:prstGeom prst="rect">
             <a:avLst/>
@@ -13553,34 +13553,34 @@
         </p:nvSpPr>
         <p:spPr>
           <a:xfrm>
-            <a:off x="7936992" y="4946904"/>
-            <a:ext cx="2011680" cy="384048"/>
-          </a:xfrm>
-          <a:prstGeom prst="rect">
-            <a:avLst/>
-          </a:prstGeom>
-          <a:noFill/>
-          <a:ln/>
-        </p:spPr>
-        <p:txBody>
-          <a:bodyPr wrap="square" lIns="0" tIns="0" rIns="0" bIns="0" rtlCol="0" anchor="ctr"/>
-          <a:lstStyle/>
-          <a:p>
-            <a:pPr algn="ctr" indent="0" marL="0">
-              <a:buNone/>
-            </a:pPr>
-            <a:r>
-              <a:rPr lang="en-US" sz="900" spc="100" kern="0" dirty="0">
-                <a:solidFill>
-                  <a:srgbClr val="808080"/>
-                </a:solidFill>
-                <a:latin typeface="Arial" pitchFamily="34" charset="0"/>
-                <a:ea typeface="Arial" pitchFamily="34" charset="-122"/>
-                <a:cs typeface="Arial" pitchFamily="34" charset="-120"/>
-              </a:rPr>
-              <a:t>DADA</a:t>
-            </a:r>
-            <a:endParaRPr lang="en-US" sz="900" dirty="0"/>
+            <a:off x="7406640" y="4946904"/>
+            <a:ext cx="2606040" cy="384048"/>
+          </a:xfrm>
+          <a:prstGeom prst="rect">
+            <a:avLst/>
+          </a:prstGeom>
+          <a:noFill/>
+          <a:ln/>
+        </p:spPr>
+        <p:txBody>
+          <a:bodyPr wrap="square" lIns="0" tIns="0" rIns="0" bIns="0" rtlCol="0" anchor="ctr"/>
+          <a:lstStyle/>
+          <a:p>
+            <a:pPr indent="0" marL="0">
+              <a:buNone/>
+            </a:pPr>
+            <a:r>
+              <a:rPr lang="en-US" sz="850" dirty="0">
+                <a:solidFill>
+                  <a:srgbClr val="404040"/>
+                </a:solidFill>
+                <a:latin typeface="Yu Gothic" pitchFamily="34" charset="0"/>
+                <a:ea typeface="Yu Gothic" pitchFamily="34" charset="-122"/>
+                <a:cs typeface="Yu Gothic" pitchFamily="34" charset="-120"/>
+              </a:rPr>
+              <a:t>『ウルトラマン』第28話(1967年)</a:t>
+            </a:r>
+            <a:endParaRPr lang="en-US" sz="850" dirty="0"/>
           </a:p>
         </p:txBody>
       </p:sp>
@@ -13618,7 +13618,7 @@
         <p:spPr>
           <a:xfrm>
             <a:off x="5943600" y="5330952"/>
-            <a:ext cx="1920240" cy="384048"/>
+            <a:ext cx="1417320" cy="384048"/>
           </a:xfrm>
           <a:prstGeom prst="rect">
             <a:avLst/>
@@ -13656,34 +13656,34 @@
         </p:nvSpPr>
         <p:spPr>
           <a:xfrm>
-            <a:off x="7936992" y="5330952"/>
-            <a:ext cx="2011680" cy="384048"/>
-          </a:xfrm>
-          <a:prstGeom prst="rect">
-            <a:avLst/>
-          </a:prstGeom>
-          <a:noFill/>
-          <a:ln/>
-        </p:spPr>
-        <p:txBody>
-          <a:bodyPr wrap="square" lIns="0" tIns="0" rIns="0" bIns="0" rtlCol="0" anchor="ctr"/>
-          <a:lstStyle/>
-          <a:p>
-            <a:pPr algn="ctr" indent="0" marL="0">
-              <a:buNone/>
-            </a:pPr>
-            <a:r>
-              <a:rPr lang="en-US" sz="900" spc="100" kern="0" dirty="0">
-                <a:solidFill>
-                  <a:srgbClr val="808080"/>
-                </a:solidFill>
-                <a:latin typeface="Arial" pitchFamily="34" charset="0"/>
-                <a:ea typeface="Arial" pitchFamily="34" charset="-122"/>
-                <a:cs typeface="Arial" pitchFamily="34" charset="-120"/>
-              </a:rPr>
-              <a:t>ALIEN METRON</a:t>
-            </a:r>
-            <a:endParaRPr lang="en-US" sz="900" dirty="0"/>
+            <a:off x="7406640" y="5330952"/>
+            <a:ext cx="2606040" cy="384048"/>
+          </a:xfrm>
+          <a:prstGeom prst="rect">
+            <a:avLst/>
+          </a:prstGeom>
+          <a:noFill/>
+          <a:ln/>
+        </p:spPr>
+        <p:txBody>
+          <a:bodyPr wrap="square" lIns="0" tIns="0" rIns="0" bIns="0" rtlCol="0" anchor="ctr"/>
+          <a:lstStyle/>
+          <a:p>
+            <a:pPr indent="0" marL="0">
+              <a:buNone/>
+            </a:pPr>
+            <a:r>
+              <a:rPr lang="en-US" sz="850" dirty="0">
+                <a:solidFill>
+                  <a:srgbClr val="404040"/>
+                </a:solidFill>
+                <a:latin typeface="Yu Gothic" pitchFamily="34" charset="0"/>
+                <a:ea typeface="Yu Gothic" pitchFamily="34" charset="-122"/>
+                <a:cs typeface="Yu Gothic" pitchFamily="34" charset="-120"/>
+              </a:rPr>
+              <a:t>『ウルトラセブン』第8話(1967年)</a:t>
+            </a:r>
+            <a:endParaRPr lang="en-US" sz="850" dirty="0"/>
           </a:p>
         </p:txBody>
       </p:sp>
@@ -13721,7 +13721,7 @@
         <p:spPr>
           <a:xfrm>
             <a:off x="5943600" y="5715000"/>
-            <a:ext cx="1920240" cy="384048"/>
+            <a:ext cx="1417320" cy="384048"/>
           </a:xfrm>
           <a:prstGeom prst="rect">
             <a:avLst/>
@@ -13759,34 +13759,34 @@
         </p:nvSpPr>
         <p:spPr>
           <a:xfrm>
-            <a:off x="7936992" y="5715000"/>
-            <a:ext cx="2011680" cy="384048"/>
-          </a:xfrm>
-          <a:prstGeom prst="rect">
-            <a:avLst/>
-          </a:prstGeom>
-          <a:noFill/>
-          <a:ln/>
-        </p:spPr>
-        <p:txBody>
-          <a:bodyPr wrap="square" lIns="0" tIns="0" rIns="0" bIns="0" rtlCol="0" anchor="ctr"/>
-          <a:lstStyle/>
-          <a:p>
-            <a:pPr algn="ctr" indent="0" marL="0">
-              <a:buNone/>
-            </a:pPr>
-            <a:r>
-              <a:rPr lang="en-US" sz="900" spc="100" kern="0" dirty="0">
-                <a:solidFill>
-                  <a:srgbClr val="808080"/>
-                </a:solidFill>
-                <a:latin typeface="Arial" pitchFamily="34" charset="0"/>
-                <a:ea typeface="Arial" pitchFamily="34" charset="-122"/>
-                <a:cs typeface="Arial" pitchFamily="34" charset="-120"/>
-              </a:rPr>
-              <a:t>KING JOE</a:t>
-            </a:r>
-            <a:endParaRPr lang="en-US" sz="900" dirty="0"/>
+            <a:off x="7406640" y="5715000"/>
+            <a:ext cx="2606040" cy="384048"/>
+          </a:xfrm>
+          <a:prstGeom prst="rect">
+            <a:avLst/>
+          </a:prstGeom>
+          <a:noFill/>
+          <a:ln/>
+        </p:spPr>
+        <p:txBody>
+          <a:bodyPr wrap="square" lIns="0" tIns="0" rIns="0" bIns="0" rtlCol="0" anchor="ctr"/>
+          <a:lstStyle/>
+          <a:p>
+            <a:pPr indent="0" marL="0">
+              <a:buNone/>
+            </a:pPr>
+            <a:r>
+              <a:rPr lang="en-US" sz="850" dirty="0">
+                <a:solidFill>
+                  <a:srgbClr val="404040"/>
+                </a:solidFill>
+                <a:latin typeface="Yu Gothic" pitchFamily="34" charset="0"/>
+                <a:ea typeface="Yu Gothic" pitchFamily="34" charset="-122"/>
+                <a:cs typeface="Yu Gothic" pitchFamily="34" charset="-120"/>
+              </a:rPr>
+              <a:t>『ウルトラセブン』第14・15話(1967–68年)</a:t>
+            </a:r>
+            <a:endParaRPr lang="en-US" sz="850" dirty="0"/>
           </a:p>
         </p:txBody>
       </p:sp>
@@ -16908,32 +16908,32 @@
         </p:nvSpPr>
         <p:spPr>
           <a:xfrm>
-            <a:off x="658368" y="1847088"/>
-            <a:ext cx="4572000" cy="219456"/>
-          </a:xfrm>
-          <a:prstGeom prst="rect">
-            <a:avLst/>
-          </a:prstGeom>
-          <a:noFill/>
-          <a:ln/>
-        </p:spPr>
-        <p:txBody>
-          <a:bodyPr wrap="square" lIns="0" tIns="0" rIns="0" bIns="0" rtlCol="0" anchor="ctr"/>
-          <a:lstStyle/>
-          <a:p>
-            <a:pPr indent="0" marL="0">
-              <a:buNone/>
-            </a:pPr>
-            <a:r>
-              <a:rPr lang="en-US" sz="900" spc="200" kern="0" dirty="0">
+            <a:off x="658368" y="1865376"/>
+            <a:ext cx="8686800" cy="219456"/>
+          </a:xfrm>
+          <a:prstGeom prst="rect">
+            <a:avLst/>
+          </a:prstGeom>
+          <a:noFill/>
+          <a:ln/>
+        </p:spPr>
+        <p:txBody>
+          <a:bodyPr wrap="square" lIns="0" tIns="0" rIns="0" bIns="0" rtlCol="0" anchor="ctr"/>
+          <a:lstStyle/>
+          <a:p>
+            <a:pPr indent="0" marL="0">
+              <a:buNone/>
+            </a:pPr>
+            <a:r>
+              <a:rPr lang="en-US" sz="900" dirty="0">
                 <a:solidFill>
                   <a:srgbClr val="808080"/>
                 </a:solidFill>
-                <a:latin typeface="Arial" pitchFamily="34" charset="0"/>
-                <a:ea typeface="Arial" pitchFamily="34" charset="-122"/>
-                <a:cs typeface="Arial" pitchFamily="34" charset="-120"/>
-              </a:rPr>
-              <a:t>ALIEN BALTAN</a:t>
+                <a:latin typeface="Yu Gothic" pitchFamily="34" charset="0"/>
+                <a:ea typeface="Yu Gothic" pitchFamily="34" charset="-122"/>
+                <a:cs typeface="Yu Gothic" pitchFamily="34" charset="-120"/>
+              </a:rPr>
+              <a:t>初出:『ウルトラマン』第2話「侵略者を撃て」(1966年)</a:t>
             </a:r>
             <a:endParaRPr lang="en-US" sz="900" dirty="0"/>
           </a:p>
@@ -18115,32 +18115,32 @@
         </p:nvSpPr>
         <p:spPr>
           <a:xfrm>
-            <a:off x="658368" y="1847088"/>
-            <a:ext cx="4572000" cy="219456"/>
-          </a:xfrm>
-          <a:prstGeom prst="rect">
-            <a:avLst/>
-          </a:prstGeom>
-          <a:noFill/>
-          <a:ln/>
-        </p:spPr>
-        <p:txBody>
-          <a:bodyPr wrap="square" lIns="0" tIns="0" rIns="0" bIns="0" rtlCol="0" anchor="ctr"/>
-          <a:lstStyle/>
-          <a:p>
-            <a:pPr indent="0" marL="0">
-              <a:buNone/>
-            </a:pPr>
-            <a:r>
-              <a:rPr lang="en-US" sz="900" spc="200" kern="0" dirty="0">
+            <a:off x="658368" y="1865376"/>
+            <a:ext cx="8686800" cy="219456"/>
+          </a:xfrm>
+          <a:prstGeom prst="rect">
+            <a:avLst/>
+          </a:prstGeom>
+          <a:noFill/>
+          <a:ln/>
+        </p:spPr>
+        <p:txBody>
+          <a:bodyPr wrap="square" lIns="0" tIns="0" rIns="0" bIns="0" rtlCol="0" anchor="ctr"/>
+          <a:lstStyle/>
+          <a:p>
+            <a:pPr indent="0" marL="0">
+              <a:buNone/>
+            </a:pPr>
+            <a:r>
+              <a:rPr lang="en-US" sz="900" dirty="0">
                 <a:solidFill>
                   <a:srgbClr val="808080"/>
                 </a:solidFill>
-                <a:latin typeface="Arial" pitchFamily="34" charset="0"/>
-                <a:ea typeface="Arial" pitchFamily="34" charset="-122"/>
-                <a:cs typeface="Arial" pitchFamily="34" charset="-120"/>
-              </a:rPr>
-              <a:t>DADA</a:t>
+                <a:latin typeface="Yu Gothic" pitchFamily="34" charset="0"/>
+                <a:ea typeface="Yu Gothic" pitchFamily="34" charset="-122"/>
+                <a:cs typeface="Yu Gothic" pitchFamily="34" charset="-120"/>
+              </a:rPr>
+              <a:t>初出:『ウルトラマン』第28話「人間標本5・6」(1967年)</a:t>
             </a:r>
             <a:endParaRPr lang="en-US" sz="900" dirty="0"/>
           </a:p>
@@ -19322,32 +19322,32 @@
         </p:nvSpPr>
         <p:spPr>
           <a:xfrm>
-            <a:off x="658368" y="1847088"/>
-            <a:ext cx="4572000" cy="219456"/>
-          </a:xfrm>
-          <a:prstGeom prst="rect">
-            <a:avLst/>
-          </a:prstGeom>
-          <a:noFill/>
-          <a:ln/>
-        </p:spPr>
-        <p:txBody>
-          <a:bodyPr wrap="square" lIns="0" tIns="0" rIns="0" bIns="0" rtlCol="0" anchor="ctr"/>
-          <a:lstStyle/>
-          <a:p>
-            <a:pPr indent="0" marL="0">
-              <a:buNone/>
-            </a:pPr>
-            <a:r>
-              <a:rPr lang="en-US" sz="900" spc="200" kern="0" dirty="0">
+            <a:off x="658368" y="1865376"/>
+            <a:ext cx="8686800" cy="219456"/>
+          </a:xfrm>
+          <a:prstGeom prst="rect">
+            <a:avLst/>
+          </a:prstGeom>
+          <a:noFill/>
+          <a:ln/>
+        </p:spPr>
+        <p:txBody>
+          <a:bodyPr wrap="square" lIns="0" tIns="0" rIns="0" bIns="0" rtlCol="0" anchor="ctr"/>
+          <a:lstStyle/>
+          <a:p>
+            <a:pPr indent="0" marL="0">
+              <a:buNone/>
+            </a:pPr>
+            <a:r>
+              <a:rPr lang="en-US" sz="900" dirty="0">
                 <a:solidFill>
                   <a:srgbClr val="808080"/>
                 </a:solidFill>
-                <a:latin typeface="Arial" pitchFamily="34" charset="0"/>
-                <a:ea typeface="Arial" pitchFamily="34" charset="-122"/>
-                <a:cs typeface="Arial" pitchFamily="34" charset="-120"/>
-              </a:rPr>
-              <a:t>GOMORA</a:t>
+                <a:latin typeface="Yu Gothic" pitchFamily="34" charset="0"/>
+                <a:ea typeface="Yu Gothic" pitchFamily="34" charset="-122"/>
+                <a:cs typeface="Yu Gothic" pitchFamily="34" charset="-120"/>
+              </a:rPr>
+              <a:t>初出:『ウルトラマン』第26・27話「怪獣殿下」(1967年)</a:t>
             </a:r>
             <a:endParaRPr lang="en-US" sz="900" dirty="0"/>
           </a:p>
